--- a/bright-37-pinterest-pin.pptx
+++ b/bright-37-pinterest-pin.pptx
@@ -3088,20 +3088,12 @@
         <p:nvPr/>
       </p:nvGrpSpPr>
       <p:grpSpPr/>
-      <p:pic>
-        <p:nvPicPr>
-          <p:cNvPr id="2" name="Picture 1" descr="bright-37-pinterest-pin.png"/>
-          <p:cNvPicPr>
-            <a:picLocks noChangeAspect="1"/>
-          </p:cNvPicPr>
+      <p:sp>
+        <p:nvSpPr>
+          <p:cNvPr id="2" name="Rectangle 1"/>
+          <p:cNvSpPr/>
           <p:nvPr/>
-        </p:nvPicPr>
-        <p:blipFill>
-          <a:blip r:embed="rId2"/>
-          <a:stretch>
-            <a:fillRect/>
-          </a:stretch>
-        </p:blipFill>
+        </p:nvSpPr>
         <p:spPr>
           <a:xfrm>
             <a:off x="0" y="0"/>
@@ -3110,8 +3102,752 @@
           <a:prstGeom prst="rect">
             <a:avLst/>
           </a:prstGeom>
+          <a:solidFill>
+            <a:srgbClr val="FBFAF7"/>
+          </a:solidFill>
+          <a:ln>
+            <a:noFill/>
+          </a:ln>
+          <a:effectLst/>
         </p:spPr>
-      </p:pic>
+        <p:style>
+          <a:lnRef idx="1">
+            <a:schemeClr val="accent1"/>
+          </a:lnRef>
+          <a:fillRef idx="3">
+            <a:schemeClr val="accent1"/>
+          </a:fillRef>
+          <a:effectRef idx="2">
+            <a:schemeClr val="accent1"/>
+          </a:effectRef>
+          <a:fontRef idx="minor">
+            <a:schemeClr val="lt1"/>
+          </a:fontRef>
+        </p:style>
+        <p:txBody>
+          <a:bodyPr rtlCol="0" anchor="ctr"/>
+          <a:lstStyle/>
+          <a:p>
+            <a:pPr algn="ctr"/>
+          </a:p>
+        </p:txBody>
+      </p:sp>
+      <p:sp>
+        <p:nvSpPr>
+          <p:cNvPr id="3" name="Rectangle 2"/>
+          <p:cNvSpPr/>
+          <p:nvPr/>
+        </p:nvSpPr>
+        <p:spPr>
+          <a:xfrm>
+            <a:off x="3405485" y="885825"/>
+            <a:ext cx="571500" cy="9525"/>
+          </a:xfrm>
+          <a:prstGeom prst="rect">
+            <a:avLst/>
+          </a:prstGeom>
+          <a:solidFill>
+            <a:srgbClr val="97A98C"/>
+          </a:solidFill>
+          <a:ln>
+            <a:noFill/>
+          </a:ln>
+          <a:effectLst/>
+        </p:spPr>
+        <p:style>
+          <a:lnRef idx="1">
+            <a:schemeClr val="accent1"/>
+          </a:lnRef>
+          <a:fillRef idx="3">
+            <a:schemeClr val="accent1"/>
+          </a:fillRef>
+          <a:effectRef idx="2">
+            <a:schemeClr val="accent1"/>
+          </a:effectRef>
+          <a:fontRef idx="minor">
+            <a:schemeClr val="lt1"/>
+          </a:fontRef>
+        </p:style>
+        <p:txBody>
+          <a:bodyPr rtlCol="0" anchor="ctr"/>
+          <a:lstStyle/>
+          <a:p>
+            <a:pPr algn="ctr"/>
+          </a:p>
+        </p:txBody>
+      </p:sp>
+      <p:sp>
+        <p:nvSpPr>
+          <p:cNvPr id="4" name="Rectangle 3"/>
+          <p:cNvSpPr/>
+          <p:nvPr/>
+        </p:nvSpPr>
+        <p:spPr>
+          <a:xfrm>
+            <a:off x="5548015" y="885825"/>
+            <a:ext cx="571500" cy="9525"/>
+          </a:xfrm>
+          <a:prstGeom prst="rect">
+            <a:avLst/>
+          </a:prstGeom>
+          <a:solidFill>
+            <a:srgbClr val="97A98C"/>
+          </a:solidFill>
+          <a:ln>
+            <a:noFill/>
+          </a:ln>
+          <a:effectLst/>
+        </p:spPr>
+        <p:style>
+          <a:lnRef idx="1">
+            <a:schemeClr val="accent1"/>
+          </a:lnRef>
+          <a:fillRef idx="3">
+            <a:schemeClr val="accent1"/>
+          </a:fillRef>
+          <a:effectRef idx="2">
+            <a:schemeClr val="accent1"/>
+          </a:effectRef>
+          <a:fontRef idx="minor">
+            <a:schemeClr val="lt1"/>
+          </a:fontRef>
+        </p:style>
+        <p:txBody>
+          <a:bodyPr rtlCol="0" anchor="ctr"/>
+          <a:lstStyle/>
+          <a:p>
+            <a:pPr algn="ctr"/>
+          </a:p>
+        </p:txBody>
+      </p:sp>
+      <p:sp>
+        <p:nvSpPr>
+          <p:cNvPr id="5" name="Rectangle 4"/>
+          <p:cNvSpPr/>
+          <p:nvPr/>
+        </p:nvSpPr>
+        <p:spPr>
+          <a:xfrm>
+            <a:off x="762000" y="3398639"/>
+            <a:ext cx="8001000" cy="5905500"/>
+          </a:xfrm>
+          <a:prstGeom prst="rect">
+            <a:avLst/>
+          </a:prstGeom>
+          <a:solidFill>
+            <a:srgbClr val="EDE7DD"/>
+          </a:solidFill>
+          <a:ln>
+            <a:noFill/>
+          </a:ln>
+          <a:effectLst/>
+        </p:spPr>
+        <p:style>
+          <a:lnRef idx="1">
+            <a:schemeClr val="accent1"/>
+          </a:lnRef>
+          <a:fillRef idx="3">
+            <a:schemeClr val="accent1"/>
+          </a:fillRef>
+          <a:effectRef idx="2">
+            <a:schemeClr val="accent1"/>
+          </a:effectRef>
+          <a:fontRef idx="minor">
+            <a:schemeClr val="lt1"/>
+          </a:fontRef>
+        </p:style>
+        <p:txBody>
+          <a:bodyPr rtlCol="0" anchor="ctr"/>
+          <a:lstStyle/>
+          <a:p>
+            <a:pPr algn="ctr"/>
+          </a:p>
+        </p:txBody>
+      </p:sp>
+      <p:sp>
+        <p:nvSpPr>
+          <p:cNvPr id="6" name="Rectangle 5"/>
+          <p:cNvSpPr/>
+          <p:nvPr/>
+        </p:nvSpPr>
+        <p:spPr>
+          <a:xfrm>
+            <a:off x="762000" y="3398639"/>
+            <a:ext cx="8001000" cy="9525"/>
+          </a:xfrm>
+          <a:prstGeom prst="rect">
+            <a:avLst/>
+          </a:prstGeom>
+          <a:solidFill>
+            <a:srgbClr val="CED6C7"/>
+          </a:solidFill>
+          <a:ln>
+            <a:noFill/>
+          </a:ln>
+          <a:effectLst/>
+        </p:spPr>
+        <p:style>
+          <a:lnRef idx="1">
+            <a:schemeClr val="accent1"/>
+          </a:lnRef>
+          <a:fillRef idx="3">
+            <a:schemeClr val="accent1"/>
+          </a:fillRef>
+          <a:effectRef idx="2">
+            <a:schemeClr val="accent1"/>
+          </a:effectRef>
+          <a:fontRef idx="minor">
+            <a:schemeClr val="lt1"/>
+          </a:fontRef>
+        </p:style>
+        <p:txBody>
+          <a:bodyPr rtlCol="0" anchor="ctr"/>
+          <a:lstStyle/>
+          <a:p>
+            <a:pPr algn="ctr"/>
+          </a:p>
+        </p:txBody>
+      </p:sp>
+      <p:sp>
+        <p:nvSpPr>
+          <p:cNvPr id="7" name="Rectangle 6"/>
+          <p:cNvSpPr/>
+          <p:nvPr/>
+        </p:nvSpPr>
+        <p:spPr>
+          <a:xfrm>
+            <a:off x="762000" y="9294614"/>
+            <a:ext cx="8001000" cy="9525"/>
+          </a:xfrm>
+          <a:prstGeom prst="rect">
+            <a:avLst/>
+          </a:prstGeom>
+          <a:solidFill>
+            <a:srgbClr val="CED6C7"/>
+          </a:solidFill>
+          <a:ln>
+            <a:noFill/>
+          </a:ln>
+          <a:effectLst/>
+        </p:spPr>
+        <p:style>
+          <a:lnRef idx="1">
+            <a:schemeClr val="accent1"/>
+          </a:lnRef>
+          <a:fillRef idx="3">
+            <a:schemeClr val="accent1"/>
+          </a:fillRef>
+          <a:effectRef idx="2">
+            <a:schemeClr val="accent1"/>
+          </a:effectRef>
+          <a:fontRef idx="minor">
+            <a:schemeClr val="lt1"/>
+          </a:fontRef>
+        </p:style>
+        <p:txBody>
+          <a:bodyPr rtlCol="0" anchor="ctr"/>
+          <a:lstStyle/>
+          <a:p>
+            <a:pPr algn="ctr"/>
+          </a:p>
+        </p:txBody>
+      </p:sp>
+      <p:sp>
+        <p:nvSpPr>
+          <p:cNvPr id="8" name="Rectangle 7"/>
+          <p:cNvSpPr/>
+          <p:nvPr/>
+        </p:nvSpPr>
+        <p:spPr>
+          <a:xfrm>
+            <a:off x="762000" y="3398639"/>
+            <a:ext cx="9525" cy="5905500"/>
+          </a:xfrm>
+          <a:prstGeom prst="rect">
+            <a:avLst/>
+          </a:prstGeom>
+          <a:solidFill>
+            <a:srgbClr val="CED6C7"/>
+          </a:solidFill>
+          <a:ln>
+            <a:noFill/>
+          </a:ln>
+          <a:effectLst/>
+        </p:spPr>
+        <p:style>
+          <a:lnRef idx="1">
+            <a:schemeClr val="accent1"/>
+          </a:lnRef>
+          <a:fillRef idx="3">
+            <a:schemeClr val="accent1"/>
+          </a:fillRef>
+          <a:effectRef idx="2">
+            <a:schemeClr val="accent1"/>
+          </a:effectRef>
+          <a:fontRef idx="minor">
+            <a:schemeClr val="lt1"/>
+          </a:fontRef>
+        </p:style>
+        <p:txBody>
+          <a:bodyPr rtlCol="0" anchor="ctr"/>
+          <a:lstStyle/>
+          <a:p>
+            <a:pPr algn="ctr"/>
+          </a:p>
+        </p:txBody>
+      </p:sp>
+      <p:sp>
+        <p:nvSpPr>
+          <p:cNvPr id="9" name="Rectangle 8"/>
+          <p:cNvSpPr/>
+          <p:nvPr/>
+        </p:nvSpPr>
+        <p:spPr>
+          <a:xfrm>
+            <a:off x="8753475" y="3398639"/>
+            <a:ext cx="9525" cy="5905500"/>
+          </a:xfrm>
+          <a:prstGeom prst="rect">
+            <a:avLst/>
+          </a:prstGeom>
+          <a:solidFill>
+            <a:srgbClr val="CED6C7"/>
+          </a:solidFill>
+          <a:ln>
+            <a:noFill/>
+          </a:ln>
+          <a:effectLst/>
+        </p:spPr>
+        <p:style>
+          <a:lnRef idx="1">
+            <a:schemeClr val="accent1"/>
+          </a:lnRef>
+          <a:fillRef idx="3">
+            <a:schemeClr val="accent1"/>
+          </a:fillRef>
+          <a:effectRef idx="2">
+            <a:schemeClr val="accent1"/>
+          </a:effectRef>
+          <a:fontRef idx="minor">
+            <a:schemeClr val="lt1"/>
+          </a:fontRef>
+        </p:style>
+        <p:txBody>
+          <a:bodyPr rtlCol="0" anchor="ctr"/>
+          <a:lstStyle/>
+          <a:p>
+            <a:pPr algn="ctr"/>
+          </a:p>
+        </p:txBody>
+      </p:sp>
+      <p:sp>
+        <p:nvSpPr>
+          <p:cNvPr id="10" name="Rectangle 9"/>
+          <p:cNvSpPr/>
+          <p:nvPr/>
+        </p:nvSpPr>
+        <p:spPr>
+          <a:xfrm>
+            <a:off x="3538686" y="13030200"/>
+            <a:ext cx="2447627" cy="9525"/>
+          </a:xfrm>
+          <a:prstGeom prst="rect">
+            <a:avLst/>
+          </a:prstGeom>
+          <a:solidFill>
+            <a:srgbClr val="97A98C"/>
+          </a:solidFill>
+          <a:ln>
+            <a:noFill/>
+          </a:ln>
+          <a:effectLst/>
+        </p:spPr>
+        <p:style>
+          <a:lnRef idx="1">
+            <a:schemeClr val="accent1"/>
+          </a:lnRef>
+          <a:fillRef idx="3">
+            <a:schemeClr val="accent1"/>
+          </a:fillRef>
+          <a:effectRef idx="2">
+            <a:schemeClr val="accent1"/>
+          </a:effectRef>
+          <a:fontRef idx="minor">
+            <a:schemeClr val="lt1"/>
+          </a:fontRef>
+        </p:style>
+        <p:txBody>
+          <a:bodyPr rtlCol="0" anchor="ctr"/>
+          <a:lstStyle/>
+          <a:p>
+            <a:pPr algn="ctr"/>
+          </a:p>
+        </p:txBody>
+      </p:sp>
+      <p:sp>
+        <p:nvSpPr>
+          <p:cNvPr id="11" name="Rectangle 10"/>
+          <p:cNvSpPr/>
+          <p:nvPr/>
+        </p:nvSpPr>
+        <p:spPr>
+          <a:xfrm>
+            <a:off x="3538686" y="13515975"/>
+            <a:ext cx="2447627" cy="9525"/>
+          </a:xfrm>
+          <a:prstGeom prst="rect">
+            <a:avLst/>
+          </a:prstGeom>
+          <a:solidFill>
+            <a:srgbClr val="97A98C"/>
+          </a:solidFill>
+          <a:ln>
+            <a:noFill/>
+          </a:ln>
+          <a:effectLst/>
+        </p:spPr>
+        <p:style>
+          <a:lnRef idx="1">
+            <a:schemeClr val="accent1"/>
+          </a:lnRef>
+          <a:fillRef idx="3">
+            <a:schemeClr val="accent1"/>
+          </a:fillRef>
+          <a:effectRef idx="2">
+            <a:schemeClr val="accent1"/>
+          </a:effectRef>
+          <a:fontRef idx="minor">
+            <a:schemeClr val="lt1"/>
+          </a:fontRef>
+        </p:style>
+        <p:txBody>
+          <a:bodyPr rtlCol="0" anchor="ctr"/>
+          <a:lstStyle/>
+          <a:p>
+            <a:pPr algn="ctr"/>
+          </a:p>
+        </p:txBody>
+      </p:sp>
+      <p:sp>
+        <p:nvSpPr>
+          <p:cNvPr id="12" name="Rectangle 11"/>
+          <p:cNvSpPr/>
+          <p:nvPr/>
+        </p:nvSpPr>
+        <p:spPr>
+          <a:xfrm>
+            <a:off x="3538686" y="13030200"/>
+            <a:ext cx="9525" cy="495300"/>
+          </a:xfrm>
+          <a:prstGeom prst="rect">
+            <a:avLst/>
+          </a:prstGeom>
+          <a:solidFill>
+            <a:srgbClr val="97A98C"/>
+          </a:solidFill>
+          <a:ln>
+            <a:noFill/>
+          </a:ln>
+          <a:effectLst/>
+        </p:spPr>
+        <p:style>
+          <a:lnRef idx="1">
+            <a:schemeClr val="accent1"/>
+          </a:lnRef>
+          <a:fillRef idx="3">
+            <a:schemeClr val="accent1"/>
+          </a:fillRef>
+          <a:effectRef idx="2">
+            <a:schemeClr val="accent1"/>
+          </a:effectRef>
+          <a:fontRef idx="minor">
+            <a:schemeClr val="lt1"/>
+          </a:fontRef>
+        </p:style>
+        <p:txBody>
+          <a:bodyPr rtlCol="0" anchor="ctr"/>
+          <a:lstStyle/>
+          <a:p>
+            <a:pPr algn="ctr"/>
+          </a:p>
+        </p:txBody>
+      </p:sp>
+      <p:sp>
+        <p:nvSpPr>
+          <p:cNvPr id="13" name="Rectangle 12"/>
+          <p:cNvSpPr/>
+          <p:nvPr/>
+        </p:nvSpPr>
+        <p:spPr>
+          <a:xfrm>
+            <a:off x="5976789" y="13030200"/>
+            <a:ext cx="9525" cy="495300"/>
+          </a:xfrm>
+          <a:prstGeom prst="rect">
+            <a:avLst/>
+          </a:prstGeom>
+          <a:solidFill>
+            <a:srgbClr val="97A98C"/>
+          </a:solidFill>
+          <a:ln>
+            <a:noFill/>
+          </a:ln>
+          <a:effectLst/>
+        </p:spPr>
+        <p:style>
+          <a:lnRef idx="1">
+            <a:schemeClr val="accent1"/>
+          </a:lnRef>
+          <a:fillRef idx="3">
+            <a:schemeClr val="accent1"/>
+          </a:fillRef>
+          <a:effectRef idx="2">
+            <a:schemeClr val="accent1"/>
+          </a:effectRef>
+          <a:fontRef idx="minor">
+            <a:schemeClr val="lt1"/>
+          </a:fontRef>
+        </p:style>
+        <p:txBody>
+          <a:bodyPr rtlCol="0" anchor="ctr"/>
+          <a:lstStyle/>
+          <a:p>
+            <a:pPr algn="ctr"/>
+          </a:p>
+        </p:txBody>
+      </p:sp>
+      <p:sp>
+        <p:nvSpPr>
+          <p:cNvPr id="14" name="TextBox 13"/>
+          <p:cNvSpPr txBox="1"/>
+          <p:nvPr/>
+        </p:nvSpPr>
+        <p:spPr>
+          <a:xfrm>
+            <a:off x="3619976" y="804862"/>
+            <a:ext cx="2285048" cy="171450"/>
+          </a:xfrm>
+          <a:prstGeom prst="rect">
+            <a:avLst/>
+          </a:prstGeom>
+          <a:noFill/>
+        </p:spPr>
+        <p:txBody>
+          <a:bodyPr wrap="none" anchor="t" lIns="0" rIns="0" tIns="0" bIns="0"/>
+          <a:lstStyle/>
+          <a:p>
+            <a:pPr algn="ctr"/>
+            <a:r>
+              <a:rPr sz="900" i="0" b="0" spc="378">
+                <a:solidFill>
+                  <a:srgbClr val="97A98C"/>
+                </a:solidFill>
+                <a:latin typeface="Poppins"/>
+                <a:ea typeface="Poppins"/>
+                <a:cs typeface="Poppins"/>
+              </a:rPr>
+              <a:t>JUST LISTED</a:t>
+            </a:r>
+          </a:p>
+        </p:txBody>
+      </p:sp>
+      <p:sp>
+        <p:nvSpPr>
+          <p:cNvPr id="15" name="TextBox 14"/>
+          <p:cNvSpPr txBox="1"/>
+          <p:nvPr/>
+        </p:nvSpPr>
+        <p:spPr>
+          <a:xfrm>
+            <a:off x="-1828800" y="1262062"/>
+            <a:ext cx="13182600" cy="1755577"/>
+          </a:xfrm>
+          <a:prstGeom prst="rect">
+            <a:avLst/>
+          </a:prstGeom>
+          <a:noFill/>
+        </p:spPr>
+        <p:txBody>
+          <a:bodyPr wrap="none" anchor="t" lIns="0" rIns="0" tIns="0" bIns="0"/>
+          <a:lstStyle/>
+          <a:p>
+            <a:pPr algn="ctr">
+              <a:lnSpc>
+                <a:spcPct val="96000"/>
+              </a:lnSpc>
+            </a:pPr>
+            <a:r>
+              <a:rPr sz="7200" i="1" b="0">
+                <a:solidFill>
+                  <a:srgbClr val="33322E"/>
+                </a:solidFill>
+                <a:latin typeface="Cormorant Garamond"/>
+                <a:ea typeface="Cormorant Garamond"/>
+                <a:cs typeface="Cormorant Garamond"/>
+              </a:rPr>
+              <a:t>New on</a:t>
+            </a:r>
+          </a:p>
+          <a:p>
+            <a:pPr algn="ctr">
+              <a:lnSpc>
+                <a:spcPct val="96000"/>
+              </a:lnSpc>
+            </a:pPr>
+            <a:r>
+              <a:rPr sz="7200" i="1" b="0">
+                <a:solidFill>
+                  <a:srgbClr val="33322E"/>
+                </a:solidFill>
+                <a:latin typeface="Cormorant Garamond"/>
+                <a:ea typeface="Cormorant Garamond"/>
+                <a:cs typeface="Cormorant Garamond"/>
+              </a:rPr>
+              <a:t>the Market</a:t>
+            </a:r>
+          </a:p>
+        </p:txBody>
+      </p:sp>
+      <p:sp>
+        <p:nvSpPr>
+          <p:cNvPr id="16" name="TextBox 15"/>
+          <p:cNvSpPr txBox="1"/>
+          <p:nvPr/>
+        </p:nvSpPr>
+        <p:spPr>
+          <a:xfrm>
+            <a:off x="4128939" y="6265664"/>
+            <a:ext cx="2408158" cy="171450"/>
+          </a:xfrm>
+          <a:prstGeom prst="rect">
+            <a:avLst/>
+          </a:prstGeom>
+          <a:noFill/>
+        </p:spPr>
+        <p:txBody>
+          <a:bodyPr wrap="none" anchor="t" lIns="0" rIns="0" tIns="0" bIns="0"/>
+          <a:lstStyle/>
+          <a:p>
+            <a:pPr algn="l"/>
+            <a:r>
+              <a:rPr sz="900" i="0" b="0" spc="270">
+                <a:solidFill>
+                  <a:srgbClr val="8A867E"/>
+                </a:solidFill>
+                <a:latin typeface="Poppins"/>
+                <a:ea typeface="Poppins"/>
+                <a:cs typeface="Poppins"/>
+              </a:rPr>
+              <a:t>LISTING PHOTO</a:t>
+            </a:r>
+          </a:p>
+        </p:txBody>
+      </p:sp>
+      <p:sp>
+        <p:nvSpPr>
+          <p:cNvPr id="17" name="TextBox 16"/>
+          <p:cNvSpPr txBox="1"/>
+          <p:nvPr/>
+        </p:nvSpPr>
+        <p:spPr>
+          <a:xfrm>
+            <a:off x="-1828800" y="9647039"/>
+            <a:ext cx="13182600" cy="447675"/>
+          </a:xfrm>
+          <a:prstGeom prst="rect">
+            <a:avLst/>
+          </a:prstGeom>
+          <a:noFill/>
+        </p:spPr>
+        <p:txBody>
+          <a:bodyPr wrap="none" anchor="t" lIns="0" rIns="0" tIns="0" bIns="0"/>
+          <a:lstStyle/>
+          <a:p>
+            <a:pPr algn="ctr"/>
+            <a:r>
+              <a:rPr sz="3000" i="0" b="0">
+                <a:solidFill>
+                  <a:srgbClr val="33322E"/>
+                </a:solidFill>
+                <a:latin typeface="Cormorant Garamond"/>
+                <a:ea typeface="Cormorant Garamond"/>
+                <a:cs typeface="Cormorant Garamond"/>
+              </a:rPr>
+              <a:t>117 Larkspur Lane</a:t>
+            </a:r>
+          </a:p>
+        </p:txBody>
+      </p:sp>
+      <p:sp>
+        <p:nvSpPr>
+          <p:cNvPr id="18" name="TextBox 17"/>
+          <p:cNvSpPr txBox="1"/>
+          <p:nvPr/>
+        </p:nvSpPr>
+        <p:spPr>
+          <a:xfrm>
+            <a:off x="-1828800" y="10189964"/>
+            <a:ext cx="13182600" cy="190500"/>
+          </a:xfrm>
+          <a:prstGeom prst="rect">
+            <a:avLst/>
+          </a:prstGeom>
+          <a:noFill/>
+        </p:spPr>
+        <p:txBody>
+          <a:bodyPr wrap="none" anchor="t" lIns="0" rIns="0" tIns="0" bIns="0"/>
+          <a:lstStyle/>
+          <a:p>
+            <a:pPr algn="ctr"/>
+            <a:r>
+              <a:rPr sz="975" i="0" b="0" spc="234">
+                <a:solidFill>
+                  <a:srgbClr val="8A867E"/>
+                </a:solidFill>
+                <a:latin typeface="Poppins"/>
+                <a:ea typeface="Poppins"/>
+                <a:cs typeface="Poppins"/>
+              </a:rPr>
+              <a:t>AUSTIN, TX · $740,000</a:t>
+            </a:r>
+          </a:p>
+        </p:txBody>
+      </p:sp>
+      <p:sp>
+        <p:nvSpPr>
+          <p:cNvPr id="19" name="TextBox 18"/>
+          <p:cNvSpPr txBox="1"/>
+          <p:nvPr/>
+        </p:nvSpPr>
+        <p:spPr>
+          <a:xfrm>
+            <a:off x="3538686" y="13030200"/>
+            <a:ext cx="2447627" cy="495300"/>
+          </a:xfrm>
+          <a:prstGeom prst="rect">
+            <a:avLst/>
+          </a:prstGeom>
+          <a:noFill/>
+        </p:spPr>
+        <p:txBody>
+          <a:bodyPr wrap="square" anchor="t" lIns="0" rIns="0" tIns="0" bIns="0"/>
+          <a:lstStyle/>
+          <a:p>
+            <a:pPr algn="ctr"/>
+            <a:r>
+              <a:rPr sz="900" i="0" b="0" spc="270">
+                <a:solidFill>
+                  <a:srgbClr val="97A98C"/>
+                </a:solidFill>
+                <a:latin typeface="Poppins"/>
+                <a:ea typeface="Poppins"/>
+                <a:cs typeface="Poppins"/>
+              </a:rPr>
+              <a:t>SEE THE FULL TOUR</a:t>
+            </a:r>
+          </a:p>
+        </p:txBody>
+      </p:sp>
     </p:spTree>
   </p:cSld>
   <p:clrMapOvr>

--- a/bright-37-pinterest-pin.pptx
+++ b/bright-37-pinterest-pin.pptx
@@ -3228,226 +3228,6 @@
         </p:nvSpPr>
         <p:spPr>
           <a:xfrm>
-            <a:off x="762000" y="3398639"/>
-            <a:ext cx="8001000" cy="5905500"/>
-          </a:xfrm>
-          <a:prstGeom prst="rect">
-            <a:avLst/>
-          </a:prstGeom>
-          <a:solidFill>
-            <a:srgbClr val="EDE7DD"/>
-          </a:solidFill>
-          <a:ln>
-            <a:noFill/>
-          </a:ln>
-          <a:effectLst/>
-        </p:spPr>
-        <p:style>
-          <a:lnRef idx="1">
-            <a:schemeClr val="accent1"/>
-          </a:lnRef>
-          <a:fillRef idx="3">
-            <a:schemeClr val="accent1"/>
-          </a:fillRef>
-          <a:effectRef idx="2">
-            <a:schemeClr val="accent1"/>
-          </a:effectRef>
-          <a:fontRef idx="minor">
-            <a:schemeClr val="lt1"/>
-          </a:fontRef>
-        </p:style>
-        <p:txBody>
-          <a:bodyPr rtlCol="0" anchor="ctr"/>
-          <a:lstStyle/>
-          <a:p>
-            <a:pPr algn="ctr"/>
-          </a:p>
-        </p:txBody>
-      </p:sp>
-      <p:sp>
-        <p:nvSpPr>
-          <p:cNvPr id="6" name="Rectangle 5"/>
-          <p:cNvSpPr/>
-          <p:nvPr/>
-        </p:nvSpPr>
-        <p:spPr>
-          <a:xfrm>
-            <a:off x="762000" y="3398639"/>
-            <a:ext cx="8001000" cy="9525"/>
-          </a:xfrm>
-          <a:prstGeom prst="rect">
-            <a:avLst/>
-          </a:prstGeom>
-          <a:solidFill>
-            <a:srgbClr val="CED6C7"/>
-          </a:solidFill>
-          <a:ln>
-            <a:noFill/>
-          </a:ln>
-          <a:effectLst/>
-        </p:spPr>
-        <p:style>
-          <a:lnRef idx="1">
-            <a:schemeClr val="accent1"/>
-          </a:lnRef>
-          <a:fillRef idx="3">
-            <a:schemeClr val="accent1"/>
-          </a:fillRef>
-          <a:effectRef idx="2">
-            <a:schemeClr val="accent1"/>
-          </a:effectRef>
-          <a:fontRef idx="minor">
-            <a:schemeClr val="lt1"/>
-          </a:fontRef>
-        </p:style>
-        <p:txBody>
-          <a:bodyPr rtlCol="0" anchor="ctr"/>
-          <a:lstStyle/>
-          <a:p>
-            <a:pPr algn="ctr"/>
-          </a:p>
-        </p:txBody>
-      </p:sp>
-      <p:sp>
-        <p:nvSpPr>
-          <p:cNvPr id="7" name="Rectangle 6"/>
-          <p:cNvSpPr/>
-          <p:nvPr/>
-        </p:nvSpPr>
-        <p:spPr>
-          <a:xfrm>
-            <a:off x="762000" y="9294614"/>
-            <a:ext cx="8001000" cy="9525"/>
-          </a:xfrm>
-          <a:prstGeom prst="rect">
-            <a:avLst/>
-          </a:prstGeom>
-          <a:solidFill>
-            <a:srgbClr val="CED6C7"/>
-          </a:solidFill>
-          <a:ln>
-            <a:noFill/>
-          </a:ln>
-          <a:effectLst/>
-        </p:spPr>
-        <p:style>
-          <a:lnRef idx="1">
-            <a:schemeClr val="accent1"/>
-          </a:lnRef>
-          <a:fillRef idx="3">
-            <a:schemeClr val="accent1"/>
-          </a:fillRef>
-          <a:effectRef idx="2">
-            <a:schemeClr val="accent1"/>
-          </a:effectRef>
-          <a:fontRef idx="minor">
-            <a:schemeClr val="lt1"/>
-          </a:fontRef>
-        </p:style>
-        <p:txBody>
-          <a:bodyPr rtlCol="0" anchor="ctr"/>
-          <a:lstStyle/>
-          <a:p>
-            <a:pPr algn="ctr"/>
-          </a:p>
-        </p:txBody>
-      </p:sp>
-      <p:sp>
-        <p:nvSpPr>
-          <p:cNvPr id="8" name="Rectangle 7"/>
-          <p:cNvSpPr/>
-          <p:nvPr/>
-        </p:nvSpPr>
-        <p:spPr>
-          <a:xfrm>
-            <a:off x="762000" y="3398639"/>
-            <a:ext cx="9525" cy="5905500"/>
-          </a:xfrm>
-          <a:prstGeom prst="rect">
-            <a:avLst/>
-          </a:prstGeom>
-          <a:solidFill>
-            <a:srgbClr val="CED6C7"/>
-          </a:solidFill>
-          <a:ln>
-            <a:noFill/>
-          </a:ln>
-          <a:effectLst/>
-        </p:spPr>
-        <p:style>
-          <a:lnRef idx="1">
-            <a:schemeClr val="accent1"/>
-          </a:lnRef>
-          <a:fillRef idx="3">
-            <a:schemeClr val="accent1"/>
-          </a:fillRef>
-          <a:effectRef idx="2">
-            <a:schemeClr val="accent1"/>
-          </a:effectRef>
-          <a:fontRef idx="minor">
-            <a:schemeClr val="lt1"/>
-          </a:fontRef>
-        </p:style>
-        <p:txBody>
-          <a:bodyPr rtlCol="0" anchor="ctr"/>
-          <a:lstStyle/>
-          <a:p>
-            <a:pPr algn="ctr"/>
-          </a:p>
-        </p:txBody>
-      </p:sp>
-      <p:sp>
-        <p:nvSpPr>
-          <p:cNvPr id="9" name="Rectangle 8"/>
-          <p:cNvSpPr/>
-          <p:nvPr/>
-        </p:nvSpPr>
-        <p:spPr>
-          <a:xfrm>
-            <a:off x="8753475" y="3398639"/>
-            <a:ext cx="9525" cy="5905500"/>
-          </a:xfrm>
-          <a:prstGeom prst="rect">
-            <a:avLst/>
-          </a:prstGeom>
-          <a:solidFill>
-            <a:srgbClr val="CED6C7"/>
-          </a:solidFill>
-          <a:ln>
-            <a:noFill/>
-          </a:ln>
-          <a:effectLst/>
-        </p:spPr>
-        <p:style>
-          <a:lnRef idx="1">
-            <a:schemeClr val="accent1"/>
-          </a:lnRef>
-          <a:fillRef idx="3">
-            <a:schemeClr val="accent1"/>
-          </a:fillRef>
-          <a:effectRef idx="2">
-            <a:schemeClr val="accent1"/>
-          </a:effectRef>
-          <a:fontRef idx="minor">
-            <a:schemeClr val="lt1"/>
-          </a:fontRef>
-        </p:style>
-        <p:txBody>
-          <a:bodyPr rtlCol="0" anchor="ctr"/>
-          <a:lstStyle/>
-          <a:p>
-            <a:pPr algn="ctr"/>
-          </a:p>
-        </p:txBody>
-      </p:sp>
-      <p:sp>
-        <p:nvSpPr>
-          <p:cNvPr id="10" name="Rectangle 9"/>
-          <p:cNvSpPr/>
-          <p:nvPr/>
-        </p:nvSpPr>
-        <p:spPr>
-          <a:xfrm>
             <a:off x="3538686" y="13030200"/>
             <a:ext cx="2447627" cy="9525"/>
           </a:xfrm>
@@ -3486,7 +3266,7 @@
       </p:sp>
       <p:sp>
         <p:nvSpPr>
-          <p:cNvPr id="11" name="Rectangle 10"/>
+          <p:cNvPr id="6" name="Rectangle 5"/>
           <p:cNvSpPr/>
           <p:nvPr/>
         </p:nvSpPr>
@@ -3530,7 +3310,7 @@
       </p:sp>
       <p:sp>
         <p:nvSpPr>
-          <p:cNvPr id="12" name="Rectangle 11"/>
+          <p:cNvPr id="7" name="Rectangle 6"/>
           <p:cNvSpPr/>
           <p:nvPr/>
         </p:nvSpPr>
@@ -3574,7 +3354,7 @@
       </p:sp>
       <p:sp>
         <p:nvSpPr>
-          <p:cNvPr id="13" name="Rectangle 12"/>
+          <p:cNvPr id="8" name="Rectangle 7"/>
           <p:cNvSpPr/>
           <p:nvPr/>
         </p:nvSpPr>
@@ -3618,7 +3398,7 @@
       </p:sp>
       <p:sp>
         <p:nvSpPr>
-          <p:cNvPr id="14" name="TextBox 13"/>
+          <p:cNvPr id="9" name="TextBox 8"/>
           <p:cNvSpPr txBox="1"/>
           <p:nvPr/>
         </p:nvSpPr>
@@ -3653,7 +3433,7 @@
       </p:sp>
       <p:sp>
         <p:nvSpPr>
-          <p:cNvPr id="15" name="TextBox 14"/>
+          <p:cNvPr id="10" name="TextBox 9"/>
           <p:cNvSpPr txBox="1"/>
           <p:nvPr/>
         </p:nvSpPr>
@@ -3710,42 +3490,7 @@
       </p:sp>
       <p:sp>
         <p:nvSpPr>
-          <p:cNvPr id="16" name="TextBox 15"/>
-          <p:cNvSpPr txBox="1"/>
-          <p:nvPr/>
-        </p:nvSpPr>
-        <p:spPr>
-          <a:xfrm>
-            <a:off x="4128939" y="6265664"/>
-            <a:ext cx="2408158" cy="171450"/>
-          </a:xfrm>
-          <a:prstGeom prst="rect">
-            <a:avLst/>
-          </a:prstGeom>
-          <a:noFill/>
-        </p:spPr>
-        <p:txBody>
-          <a:bodyPr wrap="none" anchor="t" lIns="0" rIns="0" tIns="0" bIns="0"/>
-          <a:lstStyle/>
-          <a:p>
-            <a:pPr algn="l"/>
-            <a:r>
-              <a:rPr sz="900" i="0" b="0" spc="270">
-                <a:solidFill>
-                  <a:srgbClr val="8A867E"/>
-                </a:solidFill>
-                <a:latin typeface="Poppins"/>
-                <a:ea typeface="Poppins"/>
-                <a:cs typeface="Poppins"/>
-              </a:rPr>
-              <a:t>LISTING PHOTO</a:t>
-            </a:r>
-          </a:p>
-        </p:txBody>
-      </p:sp>
-      <p:sp>
-        <p:nvSpPr>
-          <p:cNvPr id="17" name="TextBox 16"/>
+          <p:cNvPr id="11" name="TextBox 10"/>
           <p:cNvSpPr txBox="1"/>
           <p:nvPr/>
         </p:nvSpPr>
@@ -3780,7 +3525,7 @@
       </p:sp>
       <p:sp>
         <p:nvSpPr>
-          <p:cNvPr id="18" name="TextBox 17"/>
+          <p:cNvPr id="12" name="TextBox 11"/>
           <p:cNvSpPr txBox="1"/>
           <p:nvPr/>
         </p:nvSpPr>
@@ -3815,7 +3560,7 @@
       </p:sp>
       <p:sp>
         <p:nvSpPr>
-          <p:cNvPr id="19" name="TextBox 18"/>
+          <p:cNvPr id="13" name="TextBox 12"/>
           <p:cNvSpPr txBox="1"/>
           <p:nvPr/>
         </p:nvSpPr>
@@ -3848,6 +3593,30 @@
           </a:p>
         </p:txBody>
       </p:sp>
+      <p:pic>
+        <p:nvPicPr>
+          <p:cNvPr id="14" name="Picture 13" descr="bright-37-pinterest-pin_11.png"/>
+          <p:cNvPicPr>
+            <a:picLocks noChangeAspect="1"/>
+          </p:cNvPicPr>
+          <p:nvPr/>
+        </p:nvPicPr>
+        <p:blipFill>
+          <a:blip r:embed="rId2"/>
+          <a:stretch>
+            <a:fillRect/>
+          </a:stretch>
+        </p:blipFill>
+        <p:spPr>
+          <a:xfrm>
+            <a:off x="762000" y="3398639"/>
+            <a:ext cx="8001000" cy="5905500"/>
+          </a:xfrm>
+          <a:prstGeom prst="rect">
+            <a:avLst/>
+          </a:prstGeom>
+        </p:spPr>
+      </p:pic>
     </p:spTree>
   </p:cSld>
   <p:clrMapOvr>
